--- a/curso/pptx/S10.pptx
+++ b/curso/pptx/S10.pptx
@@ -5590,7 +5590,7 @@
                 </a:solidFill>
                 <a:latin typeface="Nunito Sans"/>
               </a:rPr>
-              <a:t>«Es una deducción, así que la conclusión es verdad»</a:t>
+              <a:t>“这是演绎，所以结论是真的”</a:t>
             </a:r>
           </a:p>
           <a:p>
@@ -5615,7 +5615,7 @@
                 </a:solidFill>
                 <a:latin typeface="Nunito Sans"/>
               </a:rPr>
-              <a:t>«Si ha pasado muchas veces, pasará seguro»</a:t>
+              <a:t>“既然发生过很多次，就一定会发生”</a:t>
             </a:r>
           </a:p>
           <a:p>
@@ -5640,7 +5640,7 @@
                 </a:solidFill>
                 <a:latin typeface="Nunito Sans"/>
               </a:rPr>
-              <a:t>«La inducción no sirve para nada»</a:t>
+              <a:t>“归纳一点用也没有”</a:t>
             </a:r>
           </a:p>
         </p:txBody>
@@ -5770,7 +5770,7 @@
                 </a:solidFill>
                 <a:latin typeface="Nunito Sans"/>
               </a:rPr>
-              <a:t>La deducción asegura solo si está bien hecha y las premisas son verdad</a:t>
+              <a:t>只有演绎做得对、前提又是真的，演绎才能保证结论</a:t>
             </a:r>
           </a:p>
           <a:p>
@@ -5795,7 +5795,7 @@
                 </a:solidFill>
                 <a:latin typeface="Nunito Sans"/>
               </a:rPr>
-              <a:t>La inducción es muy útil: la usamos cada día</a:t>
+              <a:t>归纳非常有用：我们每天都在用它</a:t>
             </a:r>
           </a:p>
           <a:p>
@@ -5820,7 +5820,7 @@
                 </a:solidFill>
                 <a:latin typeface="Nunito Sans"/>
               </a:rPr>
-              <a:t>Cuantos más casos y más variados, más probable</a:t>
+              <a:t>例子越多、越多样，就越有可能</a:t>
             </a:r>
           </a:p>
         </p:txBody>
@@ -7632,7 +7632,7 @@
                 </a:solidFill>
                 <a:latin typeface="Nunito Sans"/>
               </a:rPr>
-              <a:t>P1: Todos los alumnos de 2.º tienen Inglés</a:t>
+              <a:t>P1：所有二年级学生都有英语课</a:t>
             </a:r>
           </a:p>
           <a:p>
@@ -7657,7 +7657,7 @@
                 </a:solidFill>
                 <a:latin typeface="Nunito Sans"/>
               </a:rPr>
-              <a:t>P2: Aitor es de 2.º</a:t>
+              <a:t>P2：艾托是二年级学生</a:t>
             </a:r>
           </a:p>
           <a:p>
@@ -7682,7 +7682,7 @@
                 </a:solidFill>
                 <a:latin typeface="Nunito Sans"/>
               </a:rPr>
-              <a:t>C: Por tanto, Aitor tiene Inglés</a:t>
+              <a:t>C：所以，艾托有英语课</a:t>
             </a:r>
           </a:p>
         </p:txBody>
@@ -7952,7 +7952,7 @@
                 </a:solidFill>
                 <a:latin typeface="Nunito Sans"/>
               </a:rPr>
-              <a:t>Muchas veces parte de casos que hemos visto</a:t>
+              <a:t>常常从我们见过的情况出发</a:t>
             </a:r>
           </a:p>
           <a:p>
@@ -7977,7 +7977,7 @@
                 </a:solidFill>
                 <a:latin typeface="Nunito Sans"/>
               </a:rPr>
-              <a:t>Las diez veces que fui al dentista, tuve que esperar</a:t>
+              <a:t>我去看牙医的十次，每次都得等</a:t>
             </a:r>
           </a:p>
           <a:p>
@@ -8002,7 +8002,7 @@
                 </a:solidFill>
                 <a:latin typeface="Nunito Sans"/>
               </a:rPr>
-              <a:t>Por tanto, la próxima vez también esperaré</a:t>
+              <a:t>所以，下次我也得等</a:t>
             </a:r>
           </a:p>
           <a:p>
@@ -8027,7 +8027,7 @@
                 </a:solidFill>
                 <a:latin typeface="Nunito Sans"/>
               </a:rPr>
-              <a:t>Puede fallar: quizá esta vez no haya nadie</a:t>
+              <a:t>可能会出错：也许这次一个人也没有</a:t>
             </a:r>
           </a:p>
         </p:txBody>

--- a/curso/pptx/S10.pptx
+++ b/curso/pptx/S10.pptx
@@ -4130,7 +4130,7 @@
                 </a:solidFill>
                 <a:latin typeface="Nunito Sans"/>
               </a:rPr>
-              <a:t>“球队所有队员都必须做体检。奈亚拉是球队的队员。所以，奈亚拉必须做体检。”</a:t>
+              <a:t>“球队所有队员都必须做体检。一个女孩是球队的队员。所以，她必须做体检。”</a:t>
             </a:r>
           </a:p>
         </p:txBody>
@@ -4480,7 +4480,7 @@
                 </a:solidFill>
                 <a:latin typeface="Nunito Sans"/>
               </a:rPr>
-              <a:t>结论是从哪里来的？从凯文经历过的情况里来的。</a:t>
+              <a:t>结论是从哪里来的？从一个男孩经历过的情况里来的。</a:t>
             </a:r>
           </a:p>
           <a:p>
@@ -5086,7 +5086,7 @@
                 </a:solidFill>
                 <a:latin typeface="Nunito Sans"/>
               </a:rPr>
-              <a:t>“二年级 B 班的人都有英语课。艾托有英语课。所以，艾托是二年级 B 班的。”</a:t>
+              <a:t>“二年级 B 班的人都有英语课。一个男孩有英语课。所以，他是二年级 B 班的。”</a:t>
             </a:r>
           </a:p>
         </p:txBody>
@@ -5184,7 +5184,7 @@
                 </a:solidFill>
                 <a:latin typeface="Nunito Sans"/>
               </a:rPr>
-              <a:t>两个前提都可能是真的，而艾托其实是二年级 A 班的，A 班也有英语课。</a:t>
+              <a:t>两个前提都可能是真的，而他其实是二年级 A 班的，A 班也有英语课。</a:t>
             </a:r>
           </a:p>
           <a:p>
@@ -7237,7 +7237,7 @@
                 </a:solidFill>
                 <a:latin typeface="Nunito Sans"/>
               </a:rPr>
-              <a:t>凯文：“我每次在那家店点披萨，送来的都是凉的。今天送来的也会是凉的。”</a:t>
+              <a:t>一个男孩：“我每次在那家店点披萨，送来的都是凉的。今天送来的也会是凉的。”</a:t>
             </a:r>
           </a:p>
         </p:txBody>
@@ -7657,7 +7657,7 @@
                 </a:solidFill>
                 <a:latin typeface="Nunito Sans"/>
               </a:rPr>
-              <a:t>P2：艾托是二年级学生</a:t>
+              <a:t>P2：一个男孩是二年级学生</a:t>
             </a:r>
           </a:p>
           <a:p>
@@ -7682,7 +7682,7 @@
                 </a:solidFill>
                 <a:latin typeface="Nunito Sans"/>
               </a:rPr>
-              <a:t>C：所以，艾托有英语课</a:t>
+              <a:t>C：所以，他有英语课</a:t>
             </a:r>
           </a:p>
         </p:txBody>
